--- a/neerlandais1/powerpoints/Module_17_Zitten_staan_liggen_hangen.pptx
+++ b/neerlandais1/powerpoints/Module_17_Zitten_staan_liggen_hangen.pptx
@@ -133,18 +133,18 @@
   <p:extLst>
     <p:ext uri="{521415D9-36F7-43E2-AB2F-B90AF26B5E84}">
       <p14:sectionLst xmlns:p14="http://schemas.microsoft.com/office/powerpoint/2010/main">
-        <p14:section name="Ouverture" id="{85d596c4-dc39-a818-b43f-8585c4b6c429}">
+        <p14:section name="Ouverture" id="{451e2ae7-4950-86c1-0b7c-87c1082cdec6}">
           <p14:sldIdLst>
             <p14:sldId id="256"/>
           </p14:sldIdLst>
         </p14:section>
-        <p14:section name="Découvrir" id="{1dc9b48a-2860-a979-180f-adbc8f943bd0}">
+        <p14:section name="Découvrir" id="{de5b0b28-e942-c8bd-a6f0-90b368dd51f0}">
           <p14:sldIdLst>
             <p14:sldId id="257"/>
             <p14:sldId id="258"/>
           </p14:sldIdLst>
         </p14:section>
-        <p14:section name="Comprendre" id="{2247598a-36b5-c8fe-9aff-42e020af0c7c}">
+        <p14:section name="Comprendre" id="{31342178-ced0-0b48-9d93-ef0e39b9782d}">
           <p14:sldIdLst>
             <p14:sldId id="259"/>
             <p14:sldId id="260"/>
@@ -158,7 +158,7 @@
             <p14:sldId id="268"/>
           </p14:sldIdLst>
         </p14:section>
-        <p14:section name="JIJ NU ! — Oefeningen" id="{e0af2cf3-12ed-8984-9272-7acba732340f}">
+        <p14:section name="JIJ NU ! — Oefeningen" id="{59c778dd-2a0f-dc86-be23-4893cb500bcd}">
           <p14:sldIdLst>
             <p14:sldId id="269"/>
             <p14:sldId id="270"/>
@@ -175,7 +175,7 @@
             <p14:sldId id="281"/>
           </p14:sldIdLst>
         </p14:section>
-        <p14:section name="Clôture" id="{7f076ed3-8e6c-e40a-4dcf-9941e134fea6}">
+        <p14:section name="Clôture" id="{fe29ec13-b581-52f5-6765-dfa33b8d9c1c}">
           <p14:sldIdLst>
             <p14:sldId id="282"/>
           </p14:sldIdLst>
@@ -3806,7 +3806,7 @@
                   <a:srgbClr val="FFFFFF"/>
                 </a:solidFill>
               </a:rPr>
-              <a:t>MODULE 17 / 19</a:t>
+              <a:t>MODULE 17 / 24</a:t>
             </a:r>
             <a:endParaRPr lang="en-US" sz="1400" dirty="0"/>
           </a:p>

--- a/neerlandais1/powerpoints/Module_17_Zitten_staan_liggen_hangen.pptx
+++ b/neerlandais1/powerpoints/Module_17_Zitten_staan_liggen_hangen.pptx
@@ -133,18 +133,18 @@
   <p:extLst>
     <p:ext uri="{521415D9-36F7-43E2-AB2F-B90AF26B5E84}">
       <p14:sectionLst xmlns:p14="http://schemas.microsoft.com/office/powerpoint/2010/main">
-        <p14:section name="Ouverture" id="{451e2ae7-4950-86c1-0b7c-87c1082cdec6}">
+        <p14:section name="Ouverture" id="{074ca183-156e-fd2a-0398-b797002651fe}">
           <p14:sldIdLst>
             <p14:sldId id="256"/>
           </p14:sldIdLst>
         </p14:section>
-        <p14:section name="Découvrir" id="{de5b0b28-e942-c8bd-a6f0-90b368dd51f0}">
+        <p14:section name="Découvrir" id="{2131ffcd-c50b-2f06-3aa1-541e203dd6d1}">
           <p14:sldIdLst>
             <p14:sldId id="257"/>
             <p14:sldId id="258"/>
           </p14:sldIdLst>
         </p14:section>
-        <p14:section name="Comprendre" id="{31342178-ced0-0b48-9d93-ef0e39b9782d}">
+        <p14:section name="Comprendre" id="{9078f219-e000-d438-70d3-22d44d6465fa}">
           <p14:sldIdLst>
             <p14:sldId id="259"/>
             <p14:sldId id="260"/>
@@ -158,7 +158,7 @@
             <p14:sldId id="268"/>
           </p14:sldIdLst>
         </p14:section>
-        <p14:section name="JIJ NU ! — Oefeningen" id="{59c778dd-2a0f-dc86-be23-4893cb500bcd}">
+        <p14:section name="JIJ NU ! — Oefeningen" id="{753add3e-3281-3abd-ad5d-9ac8966436b9}">
           <p14:sldIdLst>
             <p14:sldId id="269"/>
             <p14:sldId id="270"/>
@@ -175,7 +175,7 @@
             <p14:sldId id="281"/>
           </p14:sldIdLst>
         </p14:section>
-        <p14:section name="Clôture" id="{fe29ec13-b581-52f5-6765-dfa33b8d9c1c}">
+        <p14:section name="Clôture" id="{59a07012-37d5-cbc3-2bc9-81b5e022ba60}">
           <p14:sldIdLst>
             <p14:sldId id="282"/>
           </p14:sldIdLst>
@@ -3806,7 +3806,7 @@
                   <a:srgbClr val="FFFFFF"/>
                 </a:solidFill>
               </a:rPr>
-              <a:t>MODULE 17 / 24</a:t>
+              <a:t>MODULE 17 / 29</a:t>
             </a:r>
             <a:endParaRPr lang="en-US" sz="1400" dirty="0"/>
           </a:p>

--- a/neerlandais1/powerpoints/Module_17_Zitten_staan_liggen_hangen.pptx
+++ b/neerlandais1/powerpoints/Module_17_Zitten_staan_liggen_hangen.pptx
@@ -133,18 +133,18 @@
   <p:extLst>
     <p:ext uri="{521415D9-36F7-43E2-AB2F-B90AF26B5E84}">
       <p14:sectionLst xmlns:p14="http://schemas.microsoft.com/office/powerpoint/2010/main">
-        <p14:section name="Ouverture" id="{074ca183-156e-fd2a-0398-b797002651fe}">
+        <p14:section name="Ouverture" id="{17d582f1-e75a-78a7-fd2a-eae0ff4f5553}">
           <p14:sldIdLst>
             <p14:sldId id="256"/>
           </p14:sldIdLst>
         </p14:section>
-        <p14:section name="Découvrir" id="{2131ffcd-c50b-2f06-3aa1-541e203dd6d1}">
+        <p14:section name="Découvrir" id="{1db84d03-70dd-ec10-0f03-306587189a7d}">
           <p14:sldIdLst>
             <p14:sldId id="257"/>
             <p14:sldId id="258"/>
           </p14:sldIdLst>
         </p14:section>
-        <p14:section name="Comprendre" id="{9078f219-e000-d438-70d3-22d44d6465fa}">
+        <p14:section name="Comprendre" id="{4edbb448-112c-f585-bb20-997f083bb2a5}">
           <p14:sldIdLst>
             <p14:sldId id="259"/>
             <p14:sldId id="260"/>
@@ -158,7 +158,7 @@
             <p14:sldId id="268"/>
           </p14:sldIdLst>
         </p14:section>
-        <p14:section name="JIJ NU ! — Oefeningen" id="{753add3e-3281-3abd-ad5d-9ac8966436b9}">
+        <p14:section name="JIJ NU ! — Oefeningen" id="{bab85d33-a6f5-1645-f625-803365523adc}">
           <p14:sldIdLst>
             <p14:sldId id="269"/>
             <p14:sldId id="270"/>
@@ -175,7 +175,7 @@
             <p14:sldId id="281"/>
           </p14:sldIdLst>
         </p14:section>
-        <p14:section name="Clôture" id="{59a07012-37d5-cbc3-2bc9-81b5e022ba60}">
+        <p14:section name="Clôture" id="{13d96fe0-4fd9-b0f8-5e76-2de67db5c352}">
           <p14:sldIdLst>
             <p14:sldId id="282"/>
           </p14:sldIdLst>
@@ -3806,7 +3806,7 @@
                   <a:srgbClr val="FFFFFF"/>
                 </a:solidFill>
               </a:rPr>
-              <a:t>MODULE 17 / 29</a:t>
+              <a:t>MODULE 17 / 32</a:t>
             </a:r>
             <a:endParaRPr lang="en-US" sz="1400" dirty="0"/>
           </a:p>

--- a/neerlandais1/powerpoints/Module_17_Zitten_staan_liggen_hangen.pptx
+++ b/neerlandais1/powerpoints/Module_17_Zitten_staan_liggen_hangen.pptx
@@ -133,18 +133,18 @@
   <p:extLst>
     <p:ext uri="{521415D9-36F7-43E2-AB2F-B90AF26B5E84}">
       <p14:sectionLst xmlns:p14="http://schemas.microsoft.com/office/powerpoint/2010/main">
-        <p14:section name="Ouverture" id="{17d582f1-e75a-78a7-fd2a-eae0ff4f5553}">
+        <p14:section name="Ouverture" id="{957a366d-e133-bcf8-0af7-738a23d9935c}">
           <p14:sldIdLst>
             <p14:sldId id="256"/>
           </p14:sldIdLst>
         </p14:section>
-        <p14:section name="Découvrir" id="{1db84d03-70dd-ec10-0f03-306587189a7d}">
+        <p14:section name="Découvrir" id="{114a7167-6c65-6c34-c66e-2cb8669b796e}">
           <p14:sldIdLst>
             <p14:sldId id="257"/>
             <p14:sldId id="258"/>
           </p14:sldIdLst>
         </p14:section>
-        <p14:section name="Comprendre" id="{4edbb448-112c-f585-bb20-997f083bb2a5}">
+        <p14:section name="Comprendre" id="{0bed97de-1204-537a-4797-fad3e82e913c}">
           <p14:sldIdLst>
             <p14:sldId id="259"/>
             <p14:sldId id="260"/>
@@ -158,7 +158,7 @@
             <p14:sldId id="268"/>
           </p14:sldIdLst>
         </p14:section>
-        <p14:section name="JIJ NU ! — Oefeningen" id="{bab85d33-a6f5-1645-f625-803365523adc}">
+        <p14:section name="JIJ NU ! — Oefeningen" id="{a948f67f-9e2f-822f-6ed8-9b3109f9d357}">
           <p14:sldIdLst>
             <p14:sldId id="269"/>
             <p14:sldId id="270"/>
@@ -175,7 +175,7 @@
             <p14:sldId id="281"/>
           </p14:sldIdLst>
         </p14:section>
-        <p14:section name="Clôture" id="{13d96fe0-4fd9-b0f8-5e76-2de67db5c352}">
+        <p14:section name="Clôture" id="{46116a5e-3c11-7334-3747-05277c3aa927}">
           <p14:sldIdLst>
             <p14:sldId id="282"/>
           </p14:sldIdLst>

--- a/neerlandais1/powerpoints/Module_17_Zitten_staan_liggen_hangen.pptx
+++ b/neerlandais1/powerpoints/Module_17_Zitten_staan_liggen_hangen.pptx
@@ -133,18 +133,18 @@
   <p:extLst>
     <p:ext uri="{521415D9-36F7-43E2-AB2F-B90AF26B5E84}">
       <p14:sectionLst xmlns:p14="http://schemas.microsoft.com/office/powerpoint/2010/main">
-        <p14:section name="Ouverture" id="{957a366d-e133-bcf8-0af7-738a23d9935c}">
+        <p14:section name="Ouverture" id="{312fbb36-6bf2-48bc-22a5-b7cb9c081095}">
           <p14:sldIdLst>
             <p14:sldId id="256"/>
           </p14:sldIdLst>
         </p14:section>
-        <p14:section name="Découvrir" id="{114a7167-6c65-6c34-c66e-2cb8669b796e}">
+        <p14:section name="Découvrir" id="{1f9da551-a0c6-cd09-fb8a-f5a5df7247fa}">
           <p14:sldIdLst>
             <p14:sldId id="257"/>
             <p14:sldId id="258"/>
           </p14:sldIdLst>
         </p14:section>
-        <p14:section name="Comprendre" id="{0bed97de-1204-537a-4797-fad3e82e913c}">
+        <p14:section name="Comprendre" id="{4964f9b8-226b-037f-23f8-a603772382e1}">
           <p14:sldIdLst>
             <p14:sldId id="259"/>
             <p14:sldId id="260"/>
@@ -158,7 +158,7 @@
             <p14:sldId id="268"/>
           </p14:sldIdLst>
         </p14:section>
-        <p14:section name="JIJ NU ! — Oefeningen" id="{a948f67f-9e2f-822f-6ed8-9b3109f9d357}">
+        <p14:section name="JIJ NU ! — Oefeningen" id="{c3accaf0-4691-6cbc-926f-eb72a971254f}">
           <p14:sldIdLst>
             <p14:sldId id="269"/>
             <p14:sldId id="270"/>
@@ -175,7 +175,7 @@
             <p14:sldId id="281"/>
           </p14:sldIdLst>
         </p14:section>
-        <p14:section name="Clôture" id="{46116a5e-3c11-7334-3747-05277c3aa927}">
+        <p14:section name="Clôture" id="{9d12561c-09b4-b5e5-9fec-4714e023f387}">
           <p14:sldIdLst>
             <p14:sldId id="282"/>
           </p14:sldIdLst>

--- a/neerlandais1/powerpoints/Module_17_Zitten_staan_liggen_hangen.pptx
+++ b/neerlandais1/powerpoints/Module_17_Zitten_staan_liggen_hangen.pptx
@@ -133,18 +133,18 @@
   <p:extLst>
     <p:ext uri="{521415D9-36F7-43E2-AB2F-B90AF26B5E84}">
       <p14:sectionLst xmlns:p14="http://schemas.microsoft.com/office/powerpoint/2010/main">
-        <p14:section name="Ouverture" id="{312fbb36-6bf2-48bc-22a5-b7cb9c081095}">
+        <p14:section name="Ouverture" id="{17984507-a0b3-0cd1-a32d-c76f9fa342a8}">
           <p14:sldIdLst>
             <p14:sldId id="256"/>
           </p14:sldIdLst>
         </p14:section>
-        <p14:section name="Découvrir" id="{1f9da551-a0c6-cd09-fb8a-f5a5df7247fa}">
+        <p14:section name="Découvrir" id="{b6fcb9d7-2574-bc9c-9e77-c7b157273932}">
           <p14:sldIdLst>
             <p14:sldId id="257"/>
             <p14:sldId id="258"/>
           </p14:sldIdLst>
         </p14:section>
-        <p14:section name="Comprendre" id="{4964f9b8-226b-037f-23f8-a603772382e1}">
+        <p14:section name="Comprendre" id="{9dde0340-781a-b5e9-b938-aaffc7e0dc09}">
           <p14:sldIdLst>
             <p14:sldId id="259"/>
             <p14:sldId id="260"/>
@@ -158,7 +158,7 @@
             <p14:sldId id="268"/>
           </p14:sldIdLst>
         </p14:section>
-        <p14:section name="JIJ NU ! — Oefeningen" id="{c3accaf0-4691-6cbc-926f-eb72a971254f}">
+        <p14:section name="JIJ NU ! — Oefeningen" id="{a32838d9-646d-a487-53a5-cb9247bce4ea}">
           <p14:sldIdLst>
             <p14:sldId id="269"/>
             <p14:sldId id="270"/>
@@ -175,7 +175,7 @@
             <p14:sldId id="281"/>
           </p14:sldIdLst>
         </p14:section>
-        <p14:section name="Clôture" id="{9d12561c-09b4-b5e5-9fec-4714e023f387}">
+        <p14:section name="Clôture" id="{f970fb67-1786-785d-c58f-2587ee20db1a}">
           <p14:sldIdLst>
             <p14:sldId id="282"/>
           </p14:sldIdLst>

--- a/neerlandais1/powerpoints/Module_17_Zitten_staan_liggen_hangen.pptx
+++ b/neerlandais1/powerpoints/Module_17_Zitten_staan_liggen_hangen.pptx
@@ -133,18 +133,18 @@
   <p:extLst>
     <p:ext uri="{521415D9-36F7-43E2-AB2F-B90AF26B5E84}">
       <p14:sectionLst xmlns:p14="http://schemas.microsoft.com/office/powerpoint/2010/main">
-        <p14:section name="Ouverture" id="{17984507-a0b3-0cd1-a32d-c76f9fa342a8}">
+        <p14:section name="Ouverture" id="{d783fe13-9193-f125-d5ce-2c890dbb9252}">
           <p14:sldIdLst>
             <p14:sldId id="256"/>
           </p14:sldIdLst>
         </p14:section>
-        <p14:section name="Découvrir" id="{b6fcb9d7-2574-bc9c-9e77-c7b157273932}">
+        <p14:section name="Découvrir" id="{e4102a14-806a-a6a5-975b-6ef34300438a}">
           <p14:sldIdLst>
             <p14:sldId id="257"/>
             <p14:sldId id="258"/>
           </p14:sldIdLst>
         </p14:section>
-        <p14:section name="Comprendre" id="{9dde0340-781a-b5e9-b938-aaffc7e0dc09}">
+        <p14:section name="Comprendre" id="{bd48f03a-b6b2-ef30-bd69-6596f6ec8bf3}">
           <p14:sldIdLst>
             <p14:sldId id="259"/>
             <p14:sldId id="260"/>
@@ -158,7 +158,7 @@
             <p14:sldId id="268"/>
           </p14:sldIdLst>
         </p14:section>
-        <p14:section name="JIJ NU ! — Oefeningen" id="{a32838d9-646d-a487-53a5-cb9247bce4ea}">
+        <p14:section name="JIJ NU ! — Oefeningen" id="{df10f7a9-a4b5-fe91-ec9b-247d05f73e52}">
           <p14:sldIdLst>
             <p14:sldId id="269"/>
             <p14:sldId id="270"/>
@@ -175,7 +175,7 @@
             <p14:sldId id="281"/>
           </p14:sldIdLst>
         </p14:section>
-        <p14:section name="Clôture" id="{f970fb67-1786-785d-c58f-2587ee20db1a}">
+        <p14:section name="Clôture" id="{ada5f59b-3b0a-4887-7ad9-946449fc5a62}">
           <p14:sldIdLst>
             <p14:sldId id="282"/>
           </p14:sldIdLst>

--- a/neerlandais1/powerpoints/Module_17_Zitten_staan_liggen_hangen.pptx
+++ b/neerlandais1/powerpoints/Module_17_Zitten_staan_liggen_hangen.pptx
@@ -133,18 +133,18 @@
   <p:extLst>
     <p:ext uri="{521415D9-36F7-43E2-AB2F-B90AF26B5E84}">
       <p14:sectionLst xmlns:p14="http://schemas.microsoft.com/office/powerpoint/2010/main">
-        <p14:section name="Ouverture" id="{d783fe13-9193-f125-d5ce-2c890dbb9252}">
+        <p14:section name="Ouverture" id="{0d9932d8-b6a7-4791-1115-b00f877c3b93}">
           <p14:sldIdLst>
             <p14:sldId id="256"/>
           </p14:sldIdLst>
         </p14:section>
-        <p14:section name="Découvrir" id="{e4102a14-806a-a6a5-975b-6ef34300438a}">
+        <p14:section name="Découvrir" id="{198e0fda-31d9-1191-5a9c-8fea6a453cc4}">
           <p14:sldIdLst>
             <p14:sldId id="257"/>
             <p14:sldId id="258"/>
           </p14:sldIdLst>
         </p14:section>
-        <p14:section name="Comprendre" id="{bd48f03a-b6b2-ef30-bd69-6596f6ec8bf3}">
+        <p14:section name="Comprendre" id="{a55d9ef7-5943-0bce-3b5f-8cdff0eb6d0e}">
           <p14:sldIdLst>
             <p14:sldId id="259"/>
             <p14:sldId id="260"/>
@@ -158,7 +158,7 @@
             <p14:sldId id="268"/>
           </p14:sldIdLst>
         </p14:section>
-        <p14:section name="JIJ NU ! — Oefeningen" id="{df10f7a9-a4b5-fe91-ec9b-247d05f73e52}">
+        <p14:section name="JIJ NU ! — Oefeningen" id="{c30fe4a0-49f7-90c8-d16d-8309ca378418}">
           <p14:sldIdLst>
             <p14:sldId id="269"/>
             <p14:sldId id="270"/>
@@ -175,7 +175,7 @@
             <p14:sldId id="281"/>
           </p14:sldIdLst>
         </p14:section>
-        <p14:section name="Clôture" id="{ada5f59b-3b0a-4887-7ad9-946449fc5a62}">
+        <p14:section name="Clôture" id="{db097597-39e7-8efc-5f64-0a97342332ff}">
           <p14:sldIdLst>
             <p14:sldId id="282"/>
           </p14:sldIdLst>

--- a/neerlandais1/powerpoints/Module_17_Zitten_staan_liggen_hangen.pptx
+++ b/neerlandais1/powerpoints/Module_17_Zitten_staan_liggen_hangen.pptx
@@ -133,18 +133,18 @@
   <p:extLst>
     <p:ext uri="{521415D9-36F7-43E2-AB2F-B90AF26B5E84}">
       <p14:sectionLst xmlns:p14="http://schemas.microsoft.com/office/powerpoint/2010/main">
-        <p14:section name="Ouverture" id="{0d9932d8-b6a7-4791-1115-b00f877c3b93}">
+        <p14:section name="Ouverture" id="{70b21b30-4a5e-99f8-099f-0fa9e86725ec}">
           <p14:sldIdLst>
             <p14:sldId id="256"/>
           </p14:sldIdLst>
         </p14:section>
-        <p14:section name="Découvrir" id="{198e0fda-31d9-1191-5a9c-8fea6a453cc4}">
+        <p14:section name="Découvrir" id="{39c273a0-ac13-f171-9881-924c571379a2}">
           <p14:sldIdLst>
             <p14:sldId id="257"/>
             <p14:sldId id="258"/>
           </p14:sldIdLst>
         </p14:section>
-        <p14:section name="Comprendre" id="{a55d9ef7-5943-0bce-3b5f-8cdff0eb6d0e}">
+        <p14:section name="Comprendre" id="{5da773e5-35f2-5d63-eb88-81d1389ac865}">
           <p14:sldIdLst>
             <p14:sldId id="259"/>
             <p14:sldId id="260"/>
@@ -158,7 +158,7 @@
             <p14:sldId id="268"/>
           </p14:sldIdLst>
         </p14:section>
-        <p14:section name="JIJ NU ! — Oefeningen" id="{c30fe4a0-49f7-90c8-d16d-8309ca378418}">
+        <p14:section name="JIJ NU ! — Oefeningen" id="{05bd7488-3dda-8f96-687a-3a95fde0b908}">
           <p14:sldIdLst>
             <p14:sldId id="269"/>
             <p14:sldId id="270"/>
@@ -175,7 +175,7 @@
             <p14:sldId id="281"/>
           </p14:sldIdLst>
         </p14:section>
-        <p14:section name="Clôture" id="{db097597-39e7-8efc-5f64-0a97342332ff}">
+        <p14:section name="Clôture" id="{a654dc1f-8b33-3eeb-d455-cd25745c27ec}">
           <p14:sldIdLst>
             <p14:sldId id="282"/>
           </p14:sldIdLst>

--- a/neerlandais1/powerpoints/Module_17_Zitten_staan_liggen_hangen.pptx
+++ b/neerlandais1/powerpoints/Module_17_Zitten_staan_liggen_hangen.pptx
@@ -133,18 +133,18 @@
   <p:extLst>
     <p:ext uri="{521415D9-36F7-43E2-AB2F-B90AF26B5E84}">
       <p14:sectionLst xmlns:p14="http://schemas.microsoft.com/office/powerpoint/2010/main">
-        <p14:section name="Ouverture" id="{70b21b30-4a5e-99f8-099f-0fa9e86725ec}">
+        <p14:section name="Ouverture" id="{ee245704-2e4c-e418-cf75-bec9fe7be5c5}">
           <p14:sldIdLst>
             <p14:sldId id="256"/>
           </p14:sldIdLst>
         </p14:section>
-        <p14:section name="Découvrir" id="{39c273a0-ac13-f171-9881-924c571379a2}">
+        <p14:section name="Découvrir" id="{db626da9-cadc-3119-58b2-e9e4e6976496}">
           <p14:sldIdLst>
             <p14:sldId id="257"/>
             <p14:sldId id="258"/>
           </p14:sldIdLst>
         </p14:section>
-        <p14:section name="Comprendre" id="{5da773e5-35f2-5d63-eb88-81d1389ac865}">
+        <p14:section name="Comprendre" id="{99ea6051-207f-6b9e-d642-c572398994c6}">
           <p14:sldIdLst>
             <p14:sldId id="259"/>
             <p14:sldId id="260"/>
@@ -158,7 +158,7 @@
             <p14:sldId id="268"/>
           </p14:sldIdLst>
         </p14:section>
-        <p14:section name="JIJ NU ! — Oefeningen" id="{05bd7488-3dda-8f96-687a-3a95fde0b908}">
+        <p14:section name="JIJ NU ! — Oefeningen" id="{7da7d401-9877-110e-ed98-071b78d1a3f9}">
           <p14:sldIdLst>
             <p14:sldId id="269"/>
             <p14:sldId id="270"/>
@@ -175,7 +175,7 @@
             <p14:sldId id="281"/>
           </p14:sldIdLst>
         </p14:section>
-        <p14:section name="Clôture" id="{a654dc1f-8b33-3eeb-d455-cd25745c27ec}">
+        <p14:section name="Clôture" id="{a7d48632-34b2-62e9-6981-d93ccbc03fdf}">
           <p14:sldIdLst>
             <p14:sldId id="282"/>
           </p14:sldIdLst>

--- a/neerlandais1/powerpoints/Module_17_Zitten_staan_liggen_hangen.pptx
+++ b/neerlandais1/powerpoints/Module_17_Zitten_staan_liggen_hangen.pptx
@@ -133,18 +133,18 @@
   <p:extLst>
     <p:ext uri="{521415D9-36F7-43E2-AB2F-B90AF26B5E84}">
       <p14:sectionLst xmlns:p14="http://schemas.microsoft.com/office/powerpoint/2010/main">
-        <p14:section name="Ouverture" id="{ee245704-2e4c-e418-cf75-bec9fe7be5c5}">
+        <p14:section name="Ouverture" id="{9676fe2b-dc6d-8d71-4e9f-3c86ca60daed}">
           <p14:sldIdLst>
             <p14:sldId id="256"/>
           </p14:sldIdLst>
         </p14:section>
-        <p14:section name="Découvrir" id="{db626da9-cadc-3119-58b2-e9e4e6976496}">
+        <p14:section name="Découvrir" id="{4febaa74-5b5f-92f9-e51e-9dab1b817542}">
           <p14:sldIdLst>
             <p14:sldId id="257"/>
             <p14:sldId id="258"/>
           </p14:sldIdLst>
         </p14:section>
-        <p14:section name="Comprendre" id="{99ea6051-207f-6b9e-d642-c572398994c6}">
+        <p14:section name="Comprendre" id="{8a4bcc37-3170-b74e-cc26-51fa1d15cd89}">
           <p14:sldIdLst>
             <p14:sldId id="259"/>
             <p14:sldId id="260"/>
@@ -158,7 +158,7 @@
             <p14:sldId id="268"/>
           </p14:sldIdLst>
         </p14:section>
-        <p14:section name="JIJ NU ! — Oefeningen" id="{7da7d401-9877-110e-ed98-071b78d1a3f9}">
+        <p14:section name="JIJ NU ! — Oefeningen" id="{4fedf035-3649-5153-dd1e-6b2ebba61259}">
           <p14:sldIdLst>
             <p14:sldId id="269"/>
             <p14:sldId id="270"/>
@@ -175,7 +175,7 @@
             <p14:sldId id="281"/>
           </p14:sldIdLst>
         </p14:section>
-        <p14:section name="Clôture" id="{a7d48632-34b2-62e9-6981-d93ccbc03fdf}">
+        <p14:section name="Clôture" id="{64678189-bc6b-88af-a40c-2ded085f540f}">
           <p14:sldIdLst>
             <p14:sldId id="282"/>
           </p14:sldIdLst>
